--- a/htsim/sim/datacenter/experiments/runs/IB_vs_UET_presentation.pptx
+++ b/htsim/sim/datacenter/experiments/runs/IB_vs_UET_presentation.pptx
@@ -30,6 +30,15 @@
     <p:sldId id="278" r:id="rId29"/>
     <p:sldId id="279" r:id="rId30"/>
     <p:sldId id="280" r:id="rId31"/>
+    <p:sldId id="281" r:id="rId32"/>
+    <p:sldId id="282" r:id="rId33"/>
+    <p:sldId id="283" r:id="rId34"/>
+    <p:sldId id="284" r:id="rId35"/>
+    <p:sldId id="285" r:id="rId36"/>
+    <p:sldId id="286" r:id="rId37"/>
+    <p:sldId id="287" r:id="rId38"/>
+    <p:sldId id="288" r:id="rId39"/>
+    <p:sldId id="289" r:id="rId40"/>
   </p:sldIdLst>
   <p:sldSz cx="12191695" cy="6858000" type="screen4x3"/>
   <p:notesSz cx="6858000" cy="9144000"/>
@@ -3242,13 +3251,13 @@
               </a:spcAft>
             </a:pPr>
             <a:r>
-              <a:rPr sz="2200" b="0" i="0">
+              <a:rPr sz="2100" b="0" i="0">
                 <a:solidFill>
                   <a:srgbClr val="CFD8EA"/>
                 </a:solidFill>
                 <a:latin typeface="Calibri"/>
               </a:rPr>
-              <a:t>IB (RoCE + DCQCN)  vs  Ultra Ethernet (UEC)  —  a controlled study in htsim</a:t>
+              <a:t>IB (RoCE + DCQCN)  vs  Ultra Ethernet (UEC)  —  flat fabrics and rail-optimized GPU clusters</a:t>
             </a:r>
           </a:p>
         </p:txBody>
@@ -3281,13 +3290,13 @@
               </a:spcAft>
             </a:pPr>
             <a:r>
-              <a:rPr sz="1600" b="0" i="1">
+              <a:rPr sz="1500" b="0" i="1">
                 <a:solidFill>
                   <a:srgbClr val="9FB2D0"/>
                 </a:solidFill>
                 <a:latin typeface="Calibri"/>
               </a:rPr>
-              <a:t>Same fat-tree, same 200G links, same workloads — two congestion philosophies compared</a:t>
+              <a:t>Two congestion philosophies, measured on a flat 200G fat-tree and on a 1024-GPU rail-optimized cluster with NVLink</a:t>
             </a:r>
           </a:p>
         </p:txBody>
@@ -6105,13 +6114,13 @@
         <p:spPr>
           <a:xfrm>
             <a:off x="0" y="0"/>
-            <a:ext cx="12191695" cy="960120"/>
+            <a:ext cx="12191695" cy="6858000"/>
           </a:xfrm>
           <a:prstGeom prst="rect">
             <a:avLst/>
           </a:prstGeom>
           <a:solidFill>
-            <a:srgbClr val="1F3864"/>
+            <a:srgbClr val="009E73"/>
           </a:solidFill>
           <a:ln>
             <a:noFill/>
@@ -6147,8 +6156,8 @@
         </p:nvSpPr>
         <p:spPr>
           <a:xfrm>
-            <a:off x="457200" y="109728"/>
-            <a:ext cx="11247120" cy="731520"/>
+            <a:off x="914400" y="2651760"/>
+            <a:ext cx="10332720" cy="1280160"/>
           </a:xfrm>
           <a:prstGeom prst="rect">
             <a:avLst/>
@@ -6161,19 +6170,19 @@
           </a:bodyPr>
           <a:lstStyle/>
           <a:p>
-            <a:pPr algn="l">
+            <a:pPr algn="ctr">
               <a:spcAft>
                 <a:spcPts val="600"/>
               </a:spcAft>
             </a:pPr>
             <a:r>
-              <a:rPr sz="2600" b="1" i="0">
+              <a:rPr sz="4000" b="1" i="0">
                 <a:solidFill>
                   <a:srgbClr val="FFFFFF"/>
                 </a:solidFill>
                 <a:latin typeface="Calibri"/>
               </a:rPr>
-              <a:t>Conclusions</a:t>
+              <a:t>Part 2 — Rail-Optimized Clusters + NVLink</a:t>
             </a:r>
           </a:p>
         </p:txBody>
@@ -6186,8 +6195,8 @@
         </p:nvSpPr>
         <p:spPr>
           <a:xfrm>
-            <a:off x="640080" y="1234440"/>
-            <a:ext cx="10972800" cy="5120640"/>
+            <a:off x="1371600" y="3931920"/>
+            <a:ext cx="9418320" cy="914400"/>
           </a:xfrm>
           <a:prstGeom prst="rect">
             <a:avLst/>
@@ -6200,83 +6209,19 @@
           </a:bodyPr>
           <a:lstStyle/>
           <a:p>
-            <a:pPr algn="l">
-              <a:spcAft>
-                <a:spcPts val="800"/>
-              </a:spcAft>
-            </a:pPr>
-            <a:r>
-              <a:rPr sz="1900" b="1" i="0">
-                <a:solidFill>
-                  <a:srgbClr val="222222"/>
-                </a:solidFill>
-                <a:latin typeface="Calibri"/>
-              </a:rPr>
-              <a:t>• It's a clean speed-vs-robustness trade-off, not a winner-takes-all:</a:t>
-            </a:r>
-          </a:p>
-          <a:p>
-            <a:pPr lvl="1" algn="l">
-              <a:spcAft>
-                <a:spcPts val="300"/>
-              </a:spcAft>
-            </a:pPr>
-            <a:r>
-              <a:rPr sz="1600" b="0" i="0">
-                <a:solidFill>
-                  <a:srgbClr val="555555"/>
-                </a:solidFill>
-                <a:latin typeface="Calibri"/>
-              </a:rPr>
-              <a:t>• UET (lossy spray) is 2–4× faster on well-behaved / permutation traffic by exploiting all paths and saturating links — but pays with massive retransmission under congestion and fails to complete the most pathological incasts.</a:t>
-            </a:r>
-          </a:p>
-          <a:p>
-            <a:pPr lvl="1" algn="l">
-              <a:spcAft>
-                <a:spcPts val="300"/>
-              </a:spcAft>
-            </a:pPr>
-            <a:r>
-              <a:rPr sz="1600" b="0" i="0">
-                <a:solidFill>
-                  <a:srgbClr val="555555"/>
-                </a:solidFill>
-                <a:latin typeface="Calibri"/>
-              </a:rPr>
-              <a:t>• IB (lossless PFC + DCQCN) is slower (especially where it can't use multipath) but never drops a packet, completes every workload UET can't, and has a better tail on the hard 1024-node incasts — paying in back-pressure, buffering and lower utilization.</a:t>
-            </a:r>
-          </a:p>
-          <a:p>
-            <a:pPr algn="l">
-              <a:spcAft>
-                <a:spcPts val="800"/>
-              </a:spcAft>
-            </a:pPr>
-            <a:r>
-              <a:rPr sz="1900" b="0" i="0">
-                <a:solidFill>
-                  <a:srgbClr val="222222"/>
-                </a:solidFill>
-                <a:latin typeface="Calibri"/>
-              </a:rPr>
-              <a:t>• Practical read: choose UET where throughput on diverse traffic matters and the fabric can absorb retransmission; choose IB where losslessness, predictability and worst-case incast completion matter.</a:t>
-            </a:r>
-          </a:p>
-          <a:p>
-            <a:pPr algn="l">
-              <a:spcAft>
-                <a:spcPts val="800"/>
-              </a:spcAft>
-            </a:pPr>
-            <a:r>
-              <a:rPr sz="1900" b="0" i="0">
-                <a:solidFill>
-                  <a:srgbClr val="222222"/>
-                </a:solidFill>
-                <a:latin typeface="Calibri"/>
-              </a:rPr>
-              <a:t>• The comparison is controlled (identical topology, links, workloads), so these differences are attributable to the transport/fabric design itself.</a:t>
+            <a:pPr algn="ctr">
+              <a:spcAft>
+                <a:spcPts val="600"/>
+              </a:spcAft>
+            </a:pPr>
+            <a:r>
+              <a:rPr sz="1800" b="0" i="0">
+                <a:solidFill>
+                  <a:srgbClr val="CFD8EA"/>
+                </a:solidFill>
+                <a:latin typeface="Calibri"/>
+              </a:rPr>
+              <a:t>Modelling how AI clusters are actually built</a:t>
             </a:r>
           </a:p>
         </p:txBody>
@@ -6314,7 +6259,7 @@
             <a:avLst/>
           </a:prstGeom>
           <a:solidFill>
-            <a:srgbClr val="1F3864"/>
+            <a:srgbClr val="009E73"/>
           </a:solidFill>
           <a:ln>
             <a:noFill/>
@@ -6376,7 +6321,7 @@
                 </a:solidFill>
                 <a:latin typeface="Calibri"/>
               </a:rPr>
-              <a:t>Future work</a:t>
+              <a:t>Why rail-optimized? (the real hardware)</a:t>
             </a:r>
           </a:p>
         </p:txBody>
@@ -6415,7 +6360,7 @@
                 </a:solidFill>
                 <a:latin typeface="Calibri"/>
               </a:rPr>
-              <a:t>• Tune DCQCN (ECN threshold K, minimum rate) — K=8 was one sensible operating point; sweep it.</a:t>
+              <a:t>• Everything so far assumed a FLAT fabric: every GPU is just an endpoint on a fat-tree. Real AI clusters are not built that way.</a:t>
             </a:r>
           </a:p>
           <a:p>
@@ -6431,7 +6376,7 @@
                 </a:solidFill>
                 <a:latin typeface="Calibri"/>
               </a:rPr>
-              <a:t>• Adaptive routing for IB (ecmp_ar): would let IB use multiple paths and likely close much of the permutation gap.</a:t>
+              <a:t>• A DGX-class server holds 8 GPUs joined internally by NVLink/NVSwitch — roughly 450 GB/s per GPU per direction, ~18x a 200G NIC.</a:t>
             </a:r>
           </a:p>
           <a:p>
@@ -6447,7 +6392,7 @@
                 </a:solidFill>
                 <a:latin typeface="Calibri"/>
               </a:rPr>
-              <a:t>• Fill in workload parity: run serial-a2a and all-reduce on IB (UET has them; IB doesn't yet).</a:t>
+              <a:t>• Each GPU also has its OWN 200-400G NIC, and each of those NICs is wired to a DIFFERENT switch — its 'rail'. 8 GPUs per server =&gt; 8 rails.</a:t>
             </a:r>
           </a:p>
           <a:p>
@@ -6463,7 +6408,7 @@
                 </a:solidFill>
                 <a:latin typeface="Calibri"/>
               </a:rPr>
-              <a:t>• Push to larger scale (8192 nodes) and real AI communication traces (GOAL / ATLAHS).</a:t>
+              <a:t>• So a leaf switch does NOT hold whole servers: it holds ONE GPU from each of many servers — that is what makes it a rail.</a:t>
             </a:r>
           </a:p>
           <a:p>
@@ -6479,7 +6424,7 @@
                 </a:solidFill>
                 <a:latin typeface="Calibri"/>
               </a:rPr>
-              <a:t>• Symmetric metrics: recompute UET fairness per-flow; report exact UET retransmit magnitudes.</a:t>
+              <a:t>• Consequence: two GPUs on the same rail are one hop apart; two GPUs in the same server are NOT (they are on different rails) — but they have NVLink between them.</a:t>
             </a:r>
           </a:p>
           <a:p>
@@ -6495,7 +6440,7 @@
                 </a:solidFill>
                 <a:latin typeface="Calibri"/>
               </a:rPr>
-              <a:t>• Overlay IB-vs-UET figures on shared axes for the directly-comparable metrics.</a:t>
+              <a:t>• Purpose: make the traffic that collectives generate either stay inside the server (NVLink, very fast) or stay inside a rail (one leaf, no spine).</a:t>
             </a:r>
           </a:p>
         </p:txBody>
@@ -6527,13 +6472,13 @@
         <p:spPr>
           <a:xfrm>
             <a:off x="0" y="0"/>
-            <a:ext cx="12191695" cy="6858000"/>
+            <a:ext cx="12191695" cy="960120"/>
           </a:xfrm>
           <a:prstGeom prst="rect">
             <a:avLst/>
           </a:prstGeom>
           <a:solidFill>
-            <a:srgbClr val="1F3864"/>
+            <a:srgbClr val="009E73"/>
           </a:solidFill>
           <a:ln>
             <a:noFill/>
@@ -6569,8 +6514,8 @@
         </p:nvSpPr>
         <p:spPr>
           <a:xfrm>
-            <a:off x="914400" y="2834640"/>
-            <a:ext cx="10332720" cy="1188720"/>
+            <a:off x="457200" y="109728"/>
+            <a:ext cx="11247120" cy="731520"/>
           </a:xfrm>
           <a:prstGeom prst="rect">
             <a:avLst/>
@@ -6583,35 +6528,1052 @@
           </a:bodyPr>
           <a:lstStyle/>
           <a:p>
-            <a:pPr algn="ctr">
+            <a:pPr algn="l">
               <a:spcAft>
                 <a:spcPts val="600"/>
               </a:spcAft>
             </a:pPr>
             <a:r>
-              <a:rPr sz="4000" b="1" i="0">
+              <a:rPr sz="2600" b="1" i="0">
                 <a:solidFill>
                   <a:srgbClr val="FFFFFF"/>
                 </a:solidFill>
                 <a:latin typeface="Calibri"/>
               </a:rPr>
-              <a:t>Thank you</a:t>
-            </a:r>
-          </a:p>
-          <a:p>
-            <a:pPr algn="ctr">
+              <a:t>The topology we built (1024 GPUs, DGX SuperPOD-class)</a:t>
+            </a:r>
+          </a:p>
+        </p:txBody>
+      </p:sp>
+      <p:sp>
+        <p:nvSpPr>
+          <p:cNvPr id="4" name="TextBox 3"/>
+          <p:cNvSpPr txBox="1"/>
+          <p:nvPr/>
+        </p:nvSpPr>
+        <p:spPr>
+          <a:xfrm>
+            <a:off x="640080" y="1234440"/>
+            <a:ext cx="10972800" cy="5120640"/>
+          </a:xfrm>
+          <a:prstGeom prst="rect">
+            <a:avLst/>
+          </a:prstGeom>
+          <a:noFill/>
+        </p:spPr>
+        <p:txBody>
+          <a:bodyPr wrap="square" anchor="t">
+            <a:spAutoFit/>
+          </a:bodyPr>
+          <a:lstStyle/>
+          <a:p>
+            <a:pPr algn="l">
+              <a:spcAft>
+                <a:spcPts val="800"/>
+              </a:spcAft>
+            </a:pPr>
+            <a:r>
+              <a:rPr sz="1900" b="0" i="0">
+                <a:solidFill>
+                  <a:srgbClr val="222222"/>
+                </a:solidFill>
+                <a:latin typeface="Calibri"/>
+              </a:rPr>
+              <a:t>• 128 servers x 8 GPUs = 1024 GPUs; each GPU has its own 200G NIC on its own rail.</a:t>
+            </a:r>
+          </a:p>
+          <a:p>
+            <a:pPr algn="l">
+              <a:spcAft>
+                <a:spcPts val="800"/>
+              </a:spcAft>
+            </a:pPr>
+            <a:r>
+              <a:rPr sz="1900" b="0" i="0">
+                <a:solidFill>
+                  <a:srgbClr val="222222"/>
+                </a:solidFill>
+                <a:latin typeface="Calibri"/>
+              </a:rPr>
+              <a:t>• 8 rails; each rail is served by 4 leaf switches (32 servers each) =&gt; 32 leaves total, each 32 down + 32 up = 64 ports (real Quantum-2-class radix).</a:t>
+            </a:r>
+          </a:p>
+          <a:p>
+            <a:pPr algn="l">
+              <a:spcAft>
+                <a:spcPts val="800"/>
+              </a:spcAft>
+            </a:pPr>
+            <a:r>
+              <a:rPr sz="1900" b="0" i="0">
+                <a:solidFill>
+                  <a:srgbClr val="222222"/>
+                </a:solidFill>
+                <a:latin typeface="Calibri"/>
+              </a:rPr>
+              <a:t>• 32 spines, 2-tier leaf-spine, fully NON-BLOCKING, diameter 4.</a:t>
+            </a:r>
+          </a:p>
+          <a:p>
+            <a:pPr algn="l">
+              <a:spcAft>
+                <a:spcPts val="800"/>
+              </a:spcAft>
+            </a:pPr>
+            <a:r>
+              <a:rPr sz="1900" b="1" i="0">
+                <a:solidFill>
+                  <a:srgbClr val="222222"/>
+                </a:solidFill>
+                <a:latin typeface="Calibri"/>
+              </a:rPr>
+              <a:t>• Host-&gt;leaf mapping (this is the whole difference):</a:t>
+            </a:r>
+          </a:p>
+          <a:p>
+            <a:pPr lvl="1" algn="l">
+              <a:spcAft>
+                <a:spcPts val="300"/>
+              </a:spcAft>
+            </a:pPr>
+            <a:r>
+              <a:rPr sz="1600" b="0" i="0">
+                <a:solidFill>
+                  <a:srgbClr val="555555"/>
+                </a:solidFill>
+                <a:latin typeface="Calibri"/>
+              </a:rPr>
+              <a:t>• GPU g  -&gt;  rail r = g mod 8,  server s = g / 8,  leaf = r*4 + s/32</a:t>
+            </a:r>
+          </a:p>
+          <a:p>
+            <a:pPr lvl="1" algn="l">
+              <a:spcAft>
+                <a:spcPts val="300"/>
+              </a:spcAft>
+            </a:pPr>
+            <a:r>
+              <a:rPr sz="1600" b="0" i="0">
+                <a:solidFill>
+                  <a:srgbClr val="555555"/>
+                </a:solidFill>
+                <a:latin typeface="Calibri"/>
+              </a:rPr>
+              <a:t>• i.e. hosts are attached STRIDED, not consecutively. A leaf holds GPU r of 32 different servers.</a:t>
+            </a:r>
+          </a:p>
+          <a:p>
+            <a:pPr algn="l">
+              <a:spcAft>
+                <a:spcPts val="800"/>
+              </a:spcAft>
+            </a:pPr>
+            <a:r>
+              <a:rPr sz="1900" b="0" i="0">
+                <a:solidFill>
+                  <a:srgbClr val="222222"/>
+                </a:solidFill>
+                <a:latin typeface="Calibri"/>
+              </a:rPr>
+              <a:t>• Control topology: identical shape (32 leaves, 32 spines, same speeds) but CONSECUTIVE attachment — so any difference is attributable to the rail assignment alone, not the switch layout.</a:t>
+            </a:r>
+          </a:p>
+          <a:p>
+            <a:pPr algn="l">
+              <a:spcAft>
+                <a:spcPts val="800"/>
+              </a:spcAft>
+            </a:pPr>
+            <a:r>
+              <a:rPr sz="1900" b="0" i="0">
+                <a:solidFill>
+                  <a:srgbClr val="222222"/>
+                </a:solidFill>
+                <a:latin typeface="Calibri"/>
+              </a:rPr>
+              <a:t>• A second topology models the NVLink domain: 128 leaves = 128 servers, 8 GPUs each at 3600 Gbps, 100 ns links.</a:t>
+            </a:r>
+          </a:p>
+        </p:txBody>
+      </p:sp>
+    </p:spTree>
+  </p:cSld>
+  <p:clrMapOvr>
+    <a:masterClrMapping/>
+  </p:clrMapOvr>
+</p:sld>
+</file>
+
+<file path=ppt/slides/slide26.xml><?xml version="1.0" encoding="utf-8"?>
+<p:sld xmlns:a="http://schemas.openxmlformats.org/drawingml/2006/main" xmlns:p="http://schemas.openxmlformats.org/presentationml/2006/main" xmlns:r="http://schemas.openxmlformats.org/officeDocument/2006/relationships">
+  <p:cSld>
+    <p:spTree>
+      <p:nvGrpSpPr>
+        <p:cNvPr id="1" name=""/>
+        <p:cNvGrpSpPr/>
+        <p:nvPr/>
+      </p:nvGrpSpPr>
+      <p:grpSpPr/>
+      <p:sp>
+        <p:nvSpPr>
+          <p:cNvPr id="2" name="Rectangle 1"/>
+          <p:cNvSpPr/>
+          <p:nvPr/>
+        </p:nvSpPr>
+        <p:spPr>
+          <a:xfrm>
+            <a:off x="0" y="0"/>
+            <a:ext cx="12191695" cy="960120"/>
+          </a:xfrm>
+          <a:prstGeom prst="rect">
+            <a:avLst/>
+          </a:prstGeom>
+          <a:solidFill>
+            <a:srgbClr val="009E73"/>
+          </a:solidFill>
+          <a:ln>
+            <a:noFill/>
+          </a:ln>
+        </p:spPr>
+        <p:style>
+          <a:lnRef idx="1">
+            <a:schemeClr val="accent1"/>
+          </a:lnRef>
+          <a:fillRef idx="3">
+            <a:schemeClr val="accent1"/>
+          </a:fillRef>
+          <a:effectRef idx="2">
+            <a:schemeClr val="accent1"/>
+          </a:effectRef>
+          <a:fontRef idx="minor">
+            <a:schemeClr val="lt1"/>
+          </a:fontRef>
+        </p:style>
+        <p:txBody>
+          <a:bodyPr rtlCol="0" anchor="ctr"/>
+          <a:lstStyle/>
+          <a:p>
+            <a:pPr algn="ctr"/>
+          </a:p>
+        </p:txBody>
+      </p:sp>
+      <p:sp>
+        <p:nvSpPr>
+          <p:cNvPr id="3" name="TextBox 2"/>
+          <p:cNvSpPr txBox="1"/>
+          <p:nvPr/>
+        </p:nvSpPr>
+        <p:spPr>
+          <a:xfrm>
+            <a:off x="457200" y="109728"/>
+            <a:ext cx="11247120" cy="731520"/>
+          </a:xfrm>
+          <a:prstGeom prst="rect">
+            <a:avLst/>
+          </a:prstGeom>
+          <a:noFill/>
+        </p:spPr>
+        <p:txBody>
+          <a:bodyPr wrap="square" anchor="ctr">
+            <a:spAutoFit/>
+          </a:bodyPr>
+          <a:lstStyle/>
+          <a:p>
+            <a:pPr algn="l">
               <a:spcAft>
                 <a:spcPts val="600"/>
               </a:spcAft>
             </a:pPr>
             <a:r>
-              <a:rPr sz="1800" b="0" i="0">
-                <a:solidFill>
-                  <a:srgbClr val="CFD8EA"/>
-                </a:solidFill>
-                <a:latin typeface="Calibri"/>
-              </a:rPr>
-              <a:t>IB (RoCE/DCQCN) vs Ultra Ethernet — controlled comparison in htsim</a:t>
+              <a:rPr sz="2600" b="1" i="0">
+                <a:solidFill>
+                  <a:srgbClr val="FFFFFF"/>
+                </a:solidFill>
+                <a:latin typeface="Calibri"/>
+              </a:rPr>
+              <a:t>How NVLink is modelled — and why it was essential</a:t>
+            </a:r>
+          </a:p>
+        </p:txBody>
+      </p:sp>
+      <p:sp>
+        <p:nvSpPr>
+          <p:cNvPr id="4" name="TextBox 3"/>
+          <p:cNvSpPr txBox="1"/>
+          <p:nvPr/>
+        </p:nvSpPr>
+        <p:spPr>
+          <a:xfrm>
+            <a:off x="640080" y="1234440"/>
+            <a:ext cx="10972800" cy="5120640"/>
+          </a:xfrm>
+          <a:prstGeom prst="rect">
+            <a:avLst/>
+          </a:prstGeom>
+          <a:noFill/>
+        </p:spPr>
+        <p:txBody>
+          <a:bodyPr wrap="square" anchor="t">
+            <a:spAutoFit/>
+          </a:bodyPr>
+          <a:lstStyle/>
+          <a:p>
+            <a:pPr algn="l">
+              <a:spcAft>
+                <a:spcPts val="800"/>
+              </a:spcAft>
+            </a:pPr>
+            <a:r>
+              <a:rPr sz="1900" b="0" i="0">
+                <a:solidFill>
+                  <a:srgbClr val="222222"/>
+                </a:solidFill>
+                <a:latin typeface="Calibri"/>
+              </a:rPr>
+              <a:t>• A GPU has TWO attachments: NVLink to its 7 server-mates, and a rail NIC to everything else. A fat-tree gives each host only one, so we run two topologies.</a:t>
+            </a:r>
+          </a:p>
+          <a:p>
+            <a:pPr algn="l">
+              <a:spcAft>
+                <a:spcPts val="800"/>
+              </a:spcAft>
+            </a:pPr>
+            <a:r>
+              <a:rPr sz="1900" b="1" i="0">
+                <a:solidFill>
+                  <a:srgbClr val="222222"/>
+                </a:solidFill>
+                <a:latin typeface="Calibri"/>
+              </a:rPr>
+              <a:t>• The choice is made per FLOW at connect time (a flow's destination is fixed):</a:t>
+            </a:r>
+          </a:p>
+          <a:p>
+            <a:pPr lvl="1" algn="l">
+              <a:spcAft>
+                <a:spcPts val="300"/>
+              </a:spcAft>
+            </a:pPr>
+            <a:r>
+              <a:rPr sz="1600" b="0" i="0">
+                <a:solidFill>
+                  <a:srgbClr val="555555"/>
+                </a:solidFill>
+                <a:latin typeface="Calibri"/>
+              </a:rPr>
+              <a:t>• same server -&gt; NVLink topology at NVLink rate;  otherwise -&gt; rail topology at 200G.</a:t>
+            </a:r>
+          </a:p>
+          <a:p>
+            <a:pPr algn="l">
+              <a:spcAft>
+                <a:spcPts val="800"/>
+              </a:spcAft>
+            </a:pPr>
+            <a:r>
+              <a:rPr sz="1900" b="1" i="0">
+                <a:solidFill>
+                  <a:srgbClr val="222222"/>
+                </a:solidFill>
+                <a:latin typeface="Calibri"/>
+              </a:rPr>
+              <a:t>• The fabric alone was not enough: the HOST send-rate is the binding constraint. Same NVLink path, 64 MB flow:</a:t>
+            </a:r>
+          </a:p>
+          <a:p>
+            <a:pPr lvl="1" algn="l">
+              <a:spcAft>
+                <a:spcPts val="300"/>
+              </a:spcAft>
+            </a:pPr>
+            <a:r>
+              <a:rPr sz="1600" b="0" i="0">
+                <a:solidFill>
+                  <a:srgbClr val="555555"/>
+                </a:solidFill>
+                <a:latin typeface="Calibri"/>
+              </a:rPr>
+              <a:t>• 200G host rate -&gt; 2601 us    vs    3600G host rate -&gt; 145 us   (18x)</a:t>
+            </a:r>
+          </a:p>
+          <a:p>
+            <a:pPr algn="l">
+              <a:spcAft>
+                <a:spcPts val="800"/>
+              </a:spcAft>
+            </a:pPr>
+            <a:r>
+              <a:rPr sz="1900" b="0" i="0">
+                <a:solidFill>
+                  <a:srgbClr val="222222"/>
+                </a:solidFill>
+                <a:latin typeface="Calibri"/>
+              </a:rPr>
+              <a:t>• Validated on both stacks: intra-server flows hit 145 us; cross-server flows are unchanged (never mis-routed onto NVLink); and a GPU can drive NVLink and its rail NIC simultaneously.</a:t>
+            </a:r>
+          </a:p>
+          <a:p>
+            <a:pPr algn="l">
+              <a:spcAft>
+                <a:spcPts val="800"/>
+              </a:spcAft>
+            </a:pPr>
+            <a:r>
+              <a:rPr sz="1900" b="0" i="0">
+                <a:solidFill>
+                  <a:srgbClr val="222222"/>
+                </a:solidFill>
+                <a:latin typeface="Calibri"/>
+              </a:rPr>
+              <a:t>• Ablation finding: rails WITHOUT NVLink are actively harmful (IB 2.2x worse than flat) — because rails scatter a server's GPUs across 8 leaves. Rails and NVLink only make sense together.</a:t>
+            </a:r>
+          </a:p>
+        </p:txBody>
+      </p:sp>
+    </p:spTree>
+  </p:cSld>
+  <p:clrMapOvr>
+    <a:masterClrMapping/>
+  </p:clrMapOvr>
+</p:sld>
+</file>
+
+<file path=ppt/slides/slide27.xml><?xml version="1.0" encoding="utf-8"?>
+<p:sld xmlns:a="http://schemas.openxmlformats.org/drawingml/2006/main" xmlns:p="http://schemas.openxmlformats.org/presentationml/2006/main" xmlns:r="http://schemas.openxmlformats.org/officeDocument/2006/relationships">
+  <p:cSld>
+    <p:spTree>
+      <p:nvGrpSpPr>
+        <p:cNvPr id="1" name=""/>
+        <p:cNvGrpSpPr/>
+        <p:nvPr/>
+      </p:nvGrpSpPr>
+      <p:grpSpPr/>
+      <p:sp>
+        <p:nvSpPr>
+          <p:cNvPr id="2" name="Rectangle 1"/>
+          <p:cNvSpPr/>
+          <p:nvPr/>
+        </p:nvSpPr>
+        <p:spPr>
+          <a:xfrm>
+            <a:off x="0" y="0"/>
+            <a:ext cx="12191695" cy="960120"/>
+          </a:xfrm>
+          <a:prstGeom prst="rect">
+            <a:avLst/>
+          </a:prstGeom>
+          <a:solidFill>
+            <a:srgbClr val="009E73"/>
+          </a:solidFill>
+          <a:ln>
+            <a:noFill/>
+          </a:ln>
+        </p:spPr>
+        <p:style>
+          <a:lnRef idx="1">
+            <a:schemeClr val="accent1"/>
+          </a:lnRef>
+          <a:fillRef idx="3">
+            <a:schemeClr val="accent1"/>
+          </a:fillRef>
+          <a:effectRef idx="2">
+            <a:schemeClr val="accent1"/>
+          </a:effectRef>
+          <a:fontRef idx="minor">
+            <a:schemeClr val="lt1"/>
+          </a:fontRef>
+        </p:style>
+        <p:txBody>
+          <a:bodyPr rtlCol="0" anchor="ctr"/>
+          <a:lstStyle/>
+          <a:p>
+            <a:pPr algn="ctr"/>
+          </a:p>
+        </p:txBody>
+      </p:sp>
+      <p:sp>
+        <p:nvSpPr>
+          <p:cNvPr id="3" name="TextBox 2"/>
+          <p:cNvSpPr txBox="1"/>
+          <p:nvPr/>
+        </p:nvSpPr>
+        <p:spPr>
+          <a:xfrm>
+            <a:off x="457200" y="109728"/>
+            <a:ext cx="11247120" cy="731520"/>
+          </a:xfrm>
+          <a:prstGeom prst="rect">
+            <a:avLst/>
+          </a:prstGeom>
+          <a:noFill/>
+        </p:spPr>
+        <p:txBody>
+          <a:bodyPr wrap="square" anchor="ctr">
+            <a:spAutoFit/>
+          </a:bodyPr>
+          <a:lstStyle/>
+          <a:p>
+            <a:pPr algn="l">
+              <a:spcAft>
+                <a:spcPts val="600"/>
+              </a:spcAft>
+            </a:pPr>
+            <a:r>
+              <a:rPr sz="2600" b="1" i="0">
+                <a:solidFill>
+                  <a:srgbClr val="FFFFFF"/>
+                </a:solidFill>
+                <a:latin typeface="Calibri"/>
+              </a:rPr>
+              <a:t>The workloads: rail-AWARE collectives</a:t>
+            </a:r>
+          </a:p>
+        </p:txBody>
+      </p:sp>
+      <p:sp>
+        <p:nvSpPr>
+          <p:cNvPr id="4" name="TextBox 3"/>
+          <p:cNvSpPr txBox="1"/>
+          <p:nvPr/>
+        </p:nvSpPr>
+        <p:spPr>
+          <a:xfrm>
+            <a:off x="640080" y="1234440"/>
+            <a:ext cx="10972800" cy="5120640"/>
+          </a:xfrm>
+          <a:prstGeom prst="rect">
+            <a:avLst/>
+          </a:prstGeom>
+          <a:noFill/>
+        </p:spPr>
+        <p:txBody>
+          <a:bodyPr wrap="square" anchor="t">
+            <a:spAutoFit/>
+          </a:bodyPr>
+          <a:lstStyle/>
+          <a:p>
+            <a:pPr algn="l">
+              <a:spcAft>
+                <a:spcPts val="800"/>
+              </a:spcAft>
+            </a:pPr>
+            <a:r>
+              <a:rPr sz="1900" b="0" i="0">
+                <a:solidFill>
+                  <a:srgbClr val="222222"/>
+                </a:solidFill>
+                <a:latin typeface="Calibri"/>
+              </a:rPr>
+              <a:t>• A rail fabric only pays off if the collective is written for it. Standard collectives are rail-agnostic and would just pay the cost (7/8 of destinations are cross-rail).</a:t>
+            </a:r>
+          </a:p>
+          <a:p>
+            <a:pPr algn="l">
+              <a:spcAft>
+                <a:spcPts val="800"/>
+              </a:spcAft>
+            </a:pPr>
+            <a:r>
+              <a:rPr sz="1900" b="1" i="0">
+                <a:solidFill>
+                  <a:srgbClr val="222222"/>
+                </a:solidFill>
+                <a:latin typeface="Calibri"/>
+              </a:rPr>
+              <a:t>• Rail-aware all-reduce (hierarchical, as used on DGX):</a:t>
+            </a:r>
+          </a:p>
+          <a:p>
+            <a:pPr lvl="1" algn="l">
+              <a:spcAft>
+                <a:spcPts val="300"/>
+              </a:spcAft>
+            </a:pPr>
+            <a:r>
+              <a:rPr sz="1600" b="0" i="0">
+                <a:solidFill>
+                  <a:srgbClr val="555555"/>
+                </a:solidFill>
+                <a:latin typeface="Calibri"/>
+              </a:rPr>
+              <a:t>• 1. intra-server reduce-scatter over NVLink  2. rail-local all-reduce (recursive halving/doubling)  3. intra-server all-gather over NVLink</a:t>
+            </a:r>
+          </a:p>
+          <a:p>
+            <a:pPr algn="l">
+              <a:spcAft>
+                <a:spcPts val="800"/>
+              </a:spcAft>
+            </a:pPr>
+            <a:r>
+              <a:rPr sz="1900" b="1" i="0">
+                <a:solidFill>
+                  <a:srgbClr val="222222"/>
+                </a:solidFill>
+                <a:latin typeface="Calibri"/>
+              </a:rPr>
+              <a:t>• Rail-aware all-to-all = the MoE dispatch pattern (Mixture-of-Experts routing):</a:t>
+            </a:r>
+          </a:p>
+          <a:p>
+            <a:pPr lvl="1" algn="l">
+              <a:spcAft>
+                <a:spcPts val="300"/>
+              </a:spcAft>
+            </a:pPr>
+            <a:r>
+              <a:rPr sz="1600" b="0" i="0">
+                <a:solidFill>
+                  <a:srgbClr val="555555"/>
+                </a:solidFill>
+                <a:latin typeface="Calibri"/>
+              </a:rPr>
+              <a:t>• 1. NVLink shuffle so data for rail r sits on the GPU at rail r   2. rail-local all-to-all</a:t>
+            </a:r>
+          </a:p>
+          <a:p>
+            <a:pPr lvl="1" algn="l">
+              <a:spcAft>
+                <a:spcPts val="300"/>
+              </a:spcAft>
+            </a:pPr>
+            <a:r>
+              <a:rPr sz="1600" b="0" i="0">
+                <a:solidFill>
+                  <a:srgbClr val="555555"/>
+                </a:solidFill>
+                <a:latin typeface="Calibri"/>
+              </a:rPr>
+              <a:t>• trades ~1.87x more bytes for perfect locality — the bytes are cheap because they ride NVLink</a:t>
+            </a:r>
+          </a:p>
+          <a:p>
+            <a:pPr algn="l">
+              <a:spcAft>
+                <a:spcPts val="800"/>
+              </a:spcAft>
+            </a:pPr>
+            <a:r>
+              <a:rPr sz="1900" b="0" i="0">
+                <a:solidFill>
+                  <a:srgbClr val="222222"/>
+                </a:solidFill>
+                <a:latin typeface="Calibri"/>
+              </a:rPr>
+              <a:t>• Both generators assert the key property: every flow is either intra-server or same-rail — 0 flows cross a spine.</a:t>
+            </a:r>
+          </a:p>
+        </p:txBody>
+      </p:sp>
+    </p:spTree>
+  </p:cSld>
+  <p:clrMapOvr>
+    <a:masterClrMapping/>
+  </p:clrMapOvr>
+</p:sld>
+</file>
+
+<file path=ppt/slides/slide28.xml><?xml version="1.0" encoding="utf-8"?>
+<p:sld xmlns:a="http://schemas.openxmlformats.org/drawingml/2006/main" xmlns:p="http://schemas.openxmlformats.org/presentationml/2006/main" xmlns:r="http://schemas.openxmlformats.org/officeDocument/2006/relationships">
+  <p:cSld>
+    <p:spTree>
+      <p:nvGrpSpPr>
+        <p:cNvPr id="1" name=""/>
+        <p:cNvGrpSpPr/>
+        <p:nvPr/>
+      </p:nvGrpSpPr>
+      <p:grpSpPr/>
+      <p:sp>
+        <p:nvSpPr>
+          <p:cNvPr id="2" name="Rectangle 1"/>
+          <p:cNvSpPr/>
+          <p:nvPr/>
+        </p:nvSpPr>
+        <p:spPr>
+          <a:xfrm>
+            <a:off x="0" y="0"/>
+            <a:ext cx="12191695" cy="960120"/>
+          </a:xfrm>
+          <a:prstGeom prst="rect">
+            <a:avLst/>
+          </a:prstGeom>
+          <a:solidFill>
+            <a:srgbClr val="009E73"/>
+          </a:solidFill>
+          <a:ln>
+            <a:noFill/>
+          </a:ln>
+        </p:spPr>
+        <p:style>
+          <a:lnRef idx="1">
+            <a:schemeClr val="accent1"/>
+          </a:lnRef>
+          <a:fillRef idx="3">
+            <a:schemeClr val="accent1"/>
+          </a:fillRef>
+          <a:effectRef idx="2">
+            <a:schemeClr val="accent1"/>
+          </a:effectRef>
+          <a:fontRef idx="minor">
+            <a:schemeClr val="lt1"/>
+          </a:fontRef>
+        </p:style>
+        <p:txBody>
+          <a:bodyPr rtlCol="0" anchor="ctr"/>
+          <a:lstStyle/>
+          <a:p>
+            <a:pPr algn="ctr"/>
+          </a:p>
+        </p:txBody>
+      </p:sp>
+      <p:sp>
+        <p:nvSpPr>
+          <p:cNvPr id="3" name="TextBox 2"/>
+          <p:cNvSpPr txBox="1"/>
+          <p:nvPr/>
+        </p:nvSpPr>
+        <p:spPr>
+          <a:xfrm>
+            <a:off x="457200" y="109728"/>
+            <a:ext cx="11247120" cy="731520"/>
+          </a:xfrm>
+          <a:prstGeom prst="rect">
+            <a:avLst/>
+          </a:prstGeom>
+          <a:noFill/>
+        </p:spPr>
+        <p:txBody>
+          <a:bodyPr wrap="square" anchor="ctr">
+            <a:spAutoFit/>
+          </a:bodyPr>
+          <a:lstStyle/>
+          <a:p>
+            <a:pPr algn="l">
+              <a:spcAft>
+                <a:spcPts val="600"/>
+              </a:spcAft>
+            </a:pPr>
+            <a:r>
+              <a:rPr sz="2600" b="1" i="0">
+                <a:solidFill>
+                  <a:srgbClr val="FFFFFF"/>
+                </a:solidFill>
+                <a:latin typeface="Calibri"/>
+              </a:rPr>
+              <a:t>Rail results — makespan vs the shape-matched control</a:t>
+            </a:r>
+          </a:p>
+        </p:txBody>
+      </p:sp>
+      <p:pic>
+        <p:nvPicPr>
+          <p:cNvPr id="4" name="Picture 3" descr="fig1_rail_vs_flat.png"/>
+          <p:cNvPicPr>
+            <a:picLocks noChangeAspect="1"/>
+          </p:cNvPicPr>
+          <p:nvPr/>
+        </p:nvPicPr>
+        <p:blipFill>
+          <a:blip r:embed="rId2"/>
+          <a:stretch>
+            <a:fillRect/>
+          </a:stretch>
+        </p:blipFill>
+        <p:spPr>
+          <a:xfrm>
+            <a:off x="609447" y="1143000"/>
+            <a:ext cx="10972800" cy="4030361"/>
+          </a:xfrm>
+          <a:prstGeom prst="rect">
+            <a:avLst/>
+          </a:prstGeom>
+        </p:spPr>
+      </p:pic>
+      <p:sp>
+        <p:nvSpPr>
+          <p:cNvPr id="5" name="Rectangle 4"/>
+          <p:cNvSpPr/>
+          <p:nvPr/>
+        </p:nvSpPr>
+        <p:spPr>
+          <a:xfrm>
+            <a:off x="548640" y="5283089"/>
+            <a:ext cx="11091672" cy="658368"/>
+          </a:xfrm>
+          <a:prstGeom prst="rect">
+            <a:avLst/>
+          </a:prstGeom>
+          <a:solidFill>
+            <a:srgbClr val="EEF1F7"/>
+          </a:solidFill>
+          <a:ln>
+            <a:noFill/>
+          </a:ln>
+        </p:spPr>
+        <p:style>
+          <a:lnRef idx="1">
+            <a:schemeClr val="accent1"/>
+          </a:lnRef>
+          <a:fillRef idx="3">
+            <a:schemeClr val="accent1"/>
+          </a:fillRef>
+          <a:effectRef idx="2">
+            <a:schemeClr val="accent1"/>
+          </a:effectRef>
+          <a:fontRef idx="minor">
+            <a:schemeClr val="lt1"/>
+          </a:fontRef>
+        </p:style>
+        <p:txBody>
+          <a:bodyPr rtlCol="0" anchor="ctr"/>
+          <a:lstStyle/>
+          <a:p>
+            <a:pPr algn="ctr"/>
+          </a:p>
+        </p:txBody>
+      </p:sp>
+      <p:sp>
+        <p:nvSpPr>
+          <p:cNvPr id="6" name="TextBox 5"/>
+          <p:cNvSpPr txBox="1"/>
+          <p:nvPr/>
+        </p:nvSpPr>
+        <p:spPr>
+          <a:xfrm>
+            <a:off x="731520" y="5319665"/>
+            <a:ext cx="10698480" cy="585216"/>
+          </a:xfrm>
+          <a:prstGeom prst="rect">
+            <a:avLst/>
+          </a:prstGeom>
+          <a:noFill/>
+        </p:spPr>
+        <p:txBody>
+          <a:bodyPr wrap="square" anchor="ctr">
+            <a:spAutoFit/>
+          </a:bodyPr>
+          <a:lstStyle/>
+          <a:p>
+            <a:pPr algn="l">
+              <a:spcAft>
+                <a:spcPts val="600"/>
+              </a:spcAft>
+            </a:pPr>
+            <a:r>
+              <a:rPr sz="1450" b="0" i="0">
+                <a:solidFill>
+                  <a:srgbClr val="1F3864"/>
+                </a:solidFill>
+                <a:latin typeface="Calibri"/>
+              </a:rPr>
+              <a:t>Takeaway: Same switch layout in both; only the host-&gt;leaf assignment differs. IB (blue) gains on every configuration; UET (orange) barely moves.</a:t>
+            </a:r>
+          </a:p>
+        </p:txBody>
+      </p:sp>
+    </p:spTree>
+  </p:cSld>
+  <p:clrMapOvr>
+    <a:masterClrMapping/>
+  </p:clrMapOvr>
+</p:sld>
+</file>
+
+<file path=ppt/slides/slide29.xml><?xml version="1.0" encoding="utf-8"?>
+<p:sld xmlns:a="http://schemas.openxmlformats.org/drawingml/2006/main" xmlns:p="http://schemas.openxmlformats.org/presentationml/2006/main" xmlns:r="http://schemas.openxmlformats.org/officeDocument/2006/relationships">
+  <p:cSld>
+    <p:spTree>
+      <p:nvGrpSpPr>
+        <p:cNvPr id="1" name=""/>
+        <p:cNvGrpSpPr/>
+        <p:nvPr/>
+      </p:nvGrpSpPr>
+      <p:grpSpPr/>
+      <p:sp>
+        <p:nvSpPr>
+          <p:cNvPr id="2" name="Rectangle 1"/>
+          <p:cNvSpPr/>
+          <p:nvPr/>
+        </p:nvSpPr>
+        <p:spPr>
+          <a:xfrm>
+            <a:off x="0" y="0"/>
+            <a:ext cx="12191695" cy="960120"/>
+          </a:xfrm>
+          <a:prstGeom prst="rect">
+            <a:avLst/>
+          </a:prstGeom>
+          <a:solidFill>
+            <a:srgbClr val="009E73"/>
+          </a:solidFill>
+          <a:ln>
+            <a:noFill/>
+          </a:ln>
+        </p:spPr>
+        <p:style>
+          <a:lnRef idx="1">
+            <a:schemeClr val="accent1"/>
+          </a:lnRef>
+          <a:fillRef idx="3">
+            <a:schemeClr val="accent1"/>
+          </a:fillRef>
+          <a:effectRef idx="2">
+            <a:schemeClr val="accent1"/>
+          </a:effectRef>
+          <a:fontRef idx="minor">
+            <a:schemeClr val="lt1"/>
+          </a:fontRef>
+        </p:style>
+        <p:txBody>
+          <a:bodyPr rtlCol="0" anchor="ctr"/>
+          <a:lstStyle/>
+          <a:p>
+            <a:pPr algn="ctr"/>
+          </a:p>
+        </p:txBody>
+      </p:sp>
+      <p:sp>
+        <p:nvSpPr>
+          <p:cNvPr id="3" name="TextBox 2"/>
+          <p:cNvSpPr txBox="1"/>
+          <p:nvPr/>
+        </p:nvSpPr>
+        <p:spPr>
+          <a:xfrm>
+            <a:off x="457200" y="109728"/>
+            <a:ext cx="11247120" cy="731520"/>
+          </a:xfrm>
+          <a:prstGeom prst="rect">
+            <a:avLst/>
+          </a:prstGeom>
+          <a:noFill/>
+        </p:spPr>
+        <p:txBody>
+          <a:bodyPr wrap="square" anchor="ctr">
+            <a:spAutoFit/>
+          </a:bodyPr>
+          <a:lstStyle/>
+          <a:p>
+            <a:pPr algn="l">
+              <a:spcAft>
+                <a:spcPts val="600"/>
+              </a:spcAft>
+            </a:pPr>
+            <a:r>
+              <a:rPr sz="2600" b="1" i="0">
+                <a:solidFill>
+                  <a:srgbClr val="FFFFFF"/>
+                </a:solidFill>
+                <a:latin typeface="Calibri"/>
+              </a:rPr>
+              <a:t>Rail benefit, and the IB/UET ratio</a:t>
+            </a:r>
+          </a:p>
+        </p:txBody>
+      </p:sp>
+      <p:pic>
+        <p:nvPicPr>
+          <p:cNvPr id="4" name="Picture 3" descr="fig2_rail_benefit_and_ratio.png"/>
+          <p:cNvPicPr>
+            <a:picLocks noChangeAspect="1"/>
+          </p:cNvPicPr>
+          <p:nvPr/>
+        </p:nvPicPr>
+        <p:blipFill>
+          <a:blip r:embed="rId2"/>
+          <a:stretch>
+            <a:fillRect/>
+          </a:stretch>
+        </p:blipFill>
+        <p:spPr>
+          <a:xfrm>
+            <a:off x="609447" y="1143000"/>
+            <a:ext cx="10972800" cy="3823585"/>
+          </a:xfrm>
+          <a:prstGeom prst="rect">
+            <a:avLst/>
+          </a:prstGeom>
+        </p:spPr>
+      </p:pic>
+      <p:sp>
+        <p:nvSpPr>
+          <p:cNvPr id="5" name="Rectangle 4"/>
+          <p:cNvSpPr/>
+          <p:nvPr/>
+        </p:nvSpPr>
+        <p:spPr>
+          <a:xfrm>
+            <a:off x="548640" y="5076313"/>
+            <a:ext cx="11091672" cy="658368"/>
+          </a:xfrm>
+          <a:prstGeom prst="rect">
+            <a:avLst/>
+          </a:prstGeom>
+          <a:solidFill>
+            <a:srgbClr val="EEF1F7"/>
+          </a:solidFill>
+          <a:ln>
+            <a:noFill/>
+          </a:ln>
+        </p:spPr>
+        <p:style>
+          <a:lnRef idx="1">
+            <a:schemeClr val="accent1"/>
+          </a:lnRef>
+          <a:fillRef idx="3">
+            <a:schemeClr val="accent1"/>
+          </a:fillRef>
+          <a:effectRef idx="2">
+            <a:schemeClr val="accent1"/>
+          </a:effectRef>
+          <a:fontRef idx="minor">
+            <a:schemeClr val="lt1"/>
+          </a:fontRef>
+        </p:style>
+        <p:txBody>
+          <a:bodyPr rtlCol="0" anchor="ctr"/>
+          <a:lstStyle/>
+          <a:p>
+            <a:pPr algn="ctr"/>
+          </a:p>
+        </p:txBody>
+      </p:sp>
+      <p:sp>
+        <p:nvSpPr>
+          <p:cNvPr id="6" name="TextBox 5"/>
+          <p:cNvSpPr txBox="1"/>
+          <p:nvPr/>
+        </p:nvSpPr>
+        <p:spPr>
+          <a:xfrm>
+            <a:off x="731520" y="5112889"/>
+            <a:ext cx="10698480" cy="585216"/>
+          </a:xfrm>
+          <a:prstGeom prst="rect">
+            <a:avLst/>
+          </a:prstGeom>
+          <a:noFill/>
+        </p:spPr>
+        <p:txBody>
+          <a:bodyPr wrap="square" anchor="ctr">
+            <a:spAutoFit/>
+          </a:bodyPr>
+          <a:lstStyle/>
+          <a:p>
+            <a:pPr algn="l">
+              <a:spcAft>
+                <a:spcPts val="600"/>
+              </a:spcAft>
+            </a:pPr>
+            <a:r>
+              <a:rPr sz="1450" b="0" i="0">
+                <a:solidFill>
+                  <a:srgbClr val="1F3864"/>
+                </a:solidFill>
+                <a:latin typeface="Calibri"/>
+              </a:rPr>
+              <a:t>Takeaway: Left: rails help IB by 7-33% on all six runs, UET within noise. Right: on MoE all-to-all the stacks converge — and at 100 MB IB is 11% FASTER.</a:t>
             </a:r>
           </a:p>
         </p:txBody>
@@ -6879,6 +7841,1065 @@
                 <a:latin typeface="Calibri"/>
               </a:rPr>
               <a:t>• Both simulated in htsim on the SAME topology and workloads → a controlled, apples-to-apples comparison.</a:t>
+            </a:r>
+          </a:p>
+        </p:txBody>
+      </p:sp>
+    </p:spTree>
+  </p:cSld>
+  <p:clrMapOvr>
+    <a:masterClrMapping/>
+  </p:clrMapOvr>
+</p:sld>
+</file>
+
+<file path=ppt/slides/slide30.xml><?xml version="1.0" encoding="utf-8"?>
+<p:sld xmlns:a="http://schemas.openxmlformats.org/drawingml/2006/main" xmlns:p="http://schemas.openxmlformats.org/presentationml/2006/main" xmlns:r="http://schemas.openxmlformats.org/officeDocument/2006/relationships">
+  <p:cSld>
+    <p:spTree>
+      <p:nvGrpSpPr>
+        <p:cNvPr id="1" name=""/>
+        <p:cNvGrpSpPr/>
+        <p:nvPr/>
+      </p:nvGrpSpPr>
+      <p:grpSpPr/>
+      <p:sp>
+        <p:nvSpPr>
+          <p:cNvPr id="2" name="Rectangle 1"/>
+          <p:cNvSpPr/>
+          <p:nvPr/>
+        </p:nvSpPr>
+        <p:spPr>
+          <a:xfrm>
+            <a:off x="0" y="0"/>
+            <a:ext cx="12191695" cy="960120"/>
+          </a:xfrm>
+          <a:prstGeom prst="rect">
+            <a:avLst/>
+          </a:prstGeom>
+          <a:solidFill>
+            <a:srgbClr val="009E73"/>
+          </a:solidFill>
+          <a:ln>
+            <a:noFill/>
+          </a:ln>
+        </p:spPr>
+        <p:style>
+          <a:lnRef idx="1">
+            <a:schemeClr val="accent1"/>
+          </a:lnRef>
+          <a:fillRef idx="3">
+            <a:schemeClr val="accent1"/>
+          </a:fillRef>
+          <a:effectRef idx="2">
+            <a:schemeClr val="accent1"/>
+          </a:effectRef>
+          <a:fontRef idx="minor">
+            <a:schemeClr val="lt1"/>
+          </a:fontRef>
+        </p:style>
+        <p:txBody>
+          <a:bodyPr rtlCol="0" anchor="ctr"/>
+          <a:lstStyle/>
+          <a:p>
+            <a:pPr algn="ctr"/>
+          </a:p>
+        </p:txBody>
+      </p:sp>
+      <p:sp>
+        <p:nvSpPr>
+          <p:cNvPr id="3" name="TextBox 2"/>
+          <p:cNvSpPr txBox="1"/>
+          <p:nvPr/>
+        </p:nvSpPr>
+        <p:spPr>
+          <a:xfrm>
+            <a:off x="457200" y="109728"/>
+            <a:ext cx="11247120" cy="731520"/>
+          </a:xfrm>
+          <a:prstGeom prst="rect">
+            <a:avLst/>
+          </a:prstGeom>
+          <a:noFill/>
+        </p:spPr>
+        <p:txBody>
+          <a:bodyPr wrap="square" anchor="ctr">
+            <a:spAutoFit/>
+          </a:bodyPr>
+          <a:lstStyle/>
+          <a:p>
+            <a:pPr algn="l">
+              <a:spcAft>
+                <a:spcPts val="600"/>
+              </a:spcAft>
+            </a:pPr>
+            <a:r>
+              <a:rPr sz="2600" b="1" i="0">
+                <a:solidFill>
+                  <a:srgbClr val="FFFFFF"/>
+                </a:solidFill>
+                <a:latin typeface="Calibri"/>
+              </a:rPr>
+              <a:t>What each stack pays on the rail fabric</a:t>
+            </a:r>
+          </a:p>
+        </p:txBody>
+      </p:sp>
+      <p:pic>
+        <p:nvPicPr>
+          <p:cNvPr id="4" name="Picture 3" descr="fig3_rail_congestion_cost.png"/>
+          <p:cNvPicPr>
+            <a:picLocks noChangeAspect="1"/>
+          </p:cNvPicPr>
+          <p:nvPr/>
+        </p:nvPicPr>
+        <p:blipFill>
+          <a:blip r:embed="rId2"/>
+          <a:stretch>
+            <a:fillRect/>
+          </a:stretch>
+        </p:blipFill>
+        <p:spPr>
+          <a:xfrm>
+            <a:off x="609447" y="1143000"/>
+            <a:ext cx="10972800" cy="4009973"/>
+          </a:xfrm>
+          <a:prstGeom prst="rect">
+            <a:avLst/>
+          </a:prstGeom>
+        </p:spPr>
+      </p:pic>
+      <p:sp>
+        <p:nvSpPr>
+          <p:cNvPr id="5" name="Rectangle 4"/>
+          <p:cNvSpPr/>
+          <p:nvPr/>
+        </p:nvSpPr>
+        <p:spPr>
+          <a:xfrm>
+            <a:off x="548640" y="5262701"/>
+            <a:ext cx="11091672" cy="658368"/>
+          </a:xfrm>
+          <a:prstGeom prst="rect">
+            <a:avLst/>
+          </a:prstGeom>
+          <a:solidFill>
+            <a:srgbClr val="EEF1F7"/>
+          </a:solidFill>
+          <a:ln>
+            <a:noFill/>
+          </a:ln>
+        </p:spPr>
+        <p:style>
+          <a:lnRef idx="1">
+            <a:schemeClr val="accent1"/>
+          </a:lnRef>
+          <a:fillRef idx="3">
+            <a:schemeClr val="accent1"/>
+          </a:fillRef>
+          <a:effectRef idx="2">
+            <a:schemeClr val="accent1"/>
+          </a:effectRef>
+          <a:fontRef idx="minor">
+            <a:schemeClr val="lt1"/>
+          </a:fontRef>
+        </p:style>
+        <p:txBody>
+          <a:bodyPr rtlCol="0" anchor="ctr"/>
+          <a:lstStyle/>
+          <a:p>
+            <a:pPr algn="ctr"/>
+          </a:p>
+        </p:txBody>
+      </p:sp>
+      <p:sp>
+        <p:nvSpPr>
+          <p:cNvPr id="6" name="TextBox 5"/>
+          <p:cNvSpPr txBox="1"/>
+          <p:nvPr/>
+        </p:nvSpPr>
+        <p:spPr>
+          <a:xfrm>
+            <a:off x="731520" y="5299277"/>
+            <a:ext cx="10698480" cy="585216"/>
+          </a:xfrm>
+          <a:prstGeom prst="rect">
+            <a:avLst/>
+          </a:prstGeom>
+          <a:noFill/>
+        </p:spPr>
+        <p:txBody>
+          <a:bodyPr wrap="square" anchor="ctr">
+            <a:spAutoFit/>
+          </a:bodyPr>
+          <a:lstStyle/>
+          <a:p>
+            <a:pPr algn="l">
+              <a:spcAft>
+                <a:spcPts val="600"/>
+              </a:spcAft>
+            </a:pPr>
+            <a:r>
+              <a:rPr sz="1450" b="0" i="0">
+                <a:solidFill>
+                  <a:srgbClr val="1F3864"/>
+                </a:solidFill>
+                <a:latin typeface="Calibri"/>
+              </a:rPr>
+              <a:t>Takeaway: Two different currencies: IB burns time in PFC back-pressure (up to ~9.7 s of pause), UET burns bandwidth in retransmissions (up to 3.8 M packets).</a:t>
+            </a:r>
+          </a:p>
+        </p:txBody>
+      </p:sp>
+    </p:spTree>
+  </p:cSld>
+  <p:clrMapOvr>
+    <a:masterClrMapping/>
+  </p:clrMapOvr>
+</p:sld>
+</file>
+
+<file path=ppt/slides/slide31.xml><?xml version="1.0" encoding="utf-8"?>
+<p:sld xmlns:a="http://schemas.openxmlformats.org/drawingml/2006/main" xmlns:p="http://schemas.openxmlformats.org/presentationml/2006/main" xmlns:r="http://schemas.openxmlformats.org/officeDocument/2006/relationships">
+  <p:cSld>
+    <p:spTree>
+      <p:nvGrpSpPr>
+        <p:cNvPr id="1" name=""/>
+        <p:cNvGrpSpPr/>
+        <p:nvPr/>
+      </p:nvGrpSpPr>
+      <p:grpSpPr/>
+      <p:sp>
+        <p:nvSpPr>
+          <p:cNvPr id="2" name="Rectangle 1"/>
+          <p:cNvSpPr/>
+          <p:nvPr/>
+        </p:nvSpPr>
+        <p:spPr>
+          <a:xfrm>
+            <a:off x="0" y="0"/>
+            <a:ext cx="12191695" cy="960120"/>
+          </a:xfrm>
+          <a:prstGeom prst="rect">
+            <a:avLst/>
+          </a:prstGeom>
+          <a:solidFill>
+            <a:srgbClr val="009E73"/>
+          </a:solidFill>
+          <a:ln>
+            <a:noFill/>
+          </a:ln>
+        </p:spPr>
+        <p:style>
+          <a:lnRef idx="1">
+            <a:schemeClr val="accent1"/>
+          </a:lnRef>
+          <a:fillRef idx="3">
+            <a:schemeClr val="accent1"/>
+          </a:fillRef>
+          <a:effectRef idx="2">
+            <a:schemeClr val="accent1"/>
+          </a:effectRef>
+          <a:fontRef idx="minor">
+            <a:schemeClr val="lt1"/>
+          </a:fontRef>
+        </p:style>
+        <p:txBody>
+          <a:bodyPr rtlCol="0" anchor="ctr"/>
+          <a:lstStyle/>
+          <a:p>
+            <a:pPr algn="ctr"/>
+          </a:p>
+        </p:txBody>
+      </p:sp>
+      <p:sp>
+        <p:nvSpPr>
+          <p:cNvPr id="3" name="TextBox 2"/>
+          <p:cNvSpPr txBox="1"/>
+          <p:nvPr/>
+        </p:nvSpPr>
+        <p:spPr>
+          <a:xfrm>
+            <a:off x="457200" y="109728"/>
+            <a:ext cx="11247120" cy="731520"/>
+          </a:xfrm>
+          <a:prstGeom prst="rect">
+            <a:avLst/>
+          </a:prstGeom>
+          <a:noFill/>
+        </p:spPr>
+        <p:txBody>
+          <a:bodyPr wrap="square" anchor="ctr">
+            <a:spAutoFit/>
+          </a:bodyPr>
+          <a:lstStyle/>
+          <a:p>
+            <a:pPr algn="l">
+              <a:spcAft>
+                <a:spcPts val="600"/>
+              </a:spcAft>
+            </a:pPr>
+            <a:r>
+              <a:rPr sz="2600" b="1" i="0">
+                <a:solidFill>
+                  <a:srgbClr val="FFFFFF"/>
+                </a:solidFill>
+                <a:latin typeface="Calibri"/>
+              </a:rPr>
+              <a:t>Analysis — three findings</a:t>
+            </a:r>
+          </a:p>
+        </p:txBody>
+      </p:sp>
+      <p:sp>
+        <p:nvSpPr>
+          <p:cNvPr id="4" name="TextBox 3"/>
+          <p:cNvSpPr txBox="1"/>
+          <p:nvPr/>
+        </p:nvSpPr>
+        <p:spPr>
+          <a:xfrm>
+            <a:off x="640080" y="1234440"/>
+            <a:ext cx="10972800" cy="5120640"/>
+          </a:xfrm>
+          <a:prstGeom prst="rect">
+            <a:avLst/>
+          </a:prstGeom>
+          <a:noFill/>
+        </p:spPr>
+        <p:txBody>
+          <a:bodyPr wrap="square" anchor="t">
+            <a:spAutoFit/>
+          </a:bodyPr>
+          <a:lstStyle/>
+          <a:p>
+            <a:pPr algn="l">
+              <a:spcAft>
+                <a:spcPts val="800"/>
+              </a:spcAft>
+            </a:pPr>
+            <a:r>
+              <a:rPr sz="1900" b="0" i="0">
+                <a:solidFill>
+                  <a:srgbClr val="222222"/>
+                </a:solidFill>
+                <a:latin typeface="Calibri"/>
+              </a:rPr>
+              <a:t>• 1. Rail-optimization is an IB optimization.</a:t>
+            </a:r>
+          </a:p>
+          <a:p>
+            <a:pPr lvl="1" algn="l">
+              <a:spcAft>
+                <a:spcPts val="300"/>
+              </a:spcAft>
+            </a:pPr>
+            <a:r>
+              <a:rPr sz="1600" b="0" i="0">
+                <a:solidFill>
+                  <a:srgbClr val="555555"/>
+                </a:solidFill>
+                <a:latin typeface="Calibri"/>
+              </a:rPr>
+              <a:t>• Rails helped IB on all six runs (-7% to -33%); UET stayed within noise (+9% to -8%).</a:t>
+            </a:r>
+          </a:p>
+          <a:p>
+            <a:pPr lvl="1" algn="l">
+              <a:spcAft>
+                <a:spcPts val="300"/>
+              </a:spcAft>
+            </a:pPr>
+            <a:r>
+              <a:rPr sz="1600" b="0" i="0">
+                <a:solidFill>
+                  <a:srgbClr val="555555"/>
+                </a:solidFill>
+                <a:latin typeface="Calibri"/>
+              </a:rPr>
+              <a:t>• Why: rails are a LOCALITY optimization. IB pins each flow to one path, so keeping traffic on one leaf matters. UET sprays across all paths and has spare bandwidth on a non-blocking fabric, so it is largely indifferent to where traffic goes.</a:t>
+            </a:r>
+          </a:p>
+          <a:p>
+            <a:pPr algn="l">
+              <a:spcAft>
+                <a:spcPts val="800"/>
+              </a:spcAft>
+            </a:pPr>
+            <a:r>
+              <a:rPr sz="1900" b="0" i="0">
+                <a:solidFill>
+                  <a:srgbClr val="222222"/>
+                </a:solidFill>
+                <a:latin typeface="Calibri"/>
+              </a:rPr>
+              <a:t>• 2. On MoE all-to-all the two stacks converge — IB even wins at 100 MB (0.89x).</a:t>
+            </a:r>
+          </a:p>
+          <a:p>
+            <a:pPr lvl="1" algn="l">
+              <a:spcAft>
+                <a:spcPts val="300"/>
+              </a:spcAft>
+            </a:pPr>
+            <a:r>
+              <a:rPr sz="1600" b="0" i="0">
+                <a:solidFill>
+                  <a:srgbClr val="555555"/>
+                </a:solidFill>
+                <a:latin typeface="Calibri"/>
+              </a:rPr>
+              <a:t>• Versus UET's usual 3-4x lead on all-reduce. This is the sharpest reversal in the study.</a:t>
+            </a:r>
+          </a:p>
+          <a:p>
+            <a:pPr algn="l">
+              <a:spcAft>
+                <a:spcPts val="800"/>
+              </a:spcAft>
+            </a:pPr>
+            <a:r>
+              <a:rPr sz="1900" b="0" i="0">
+                <a:solidFill>
+                  <a:srgbClr val="222222"/>
+                </a:solidFill>
+                <a:latin typeface="Calibri"/>
+              </a:rPr>
+              <a:t>• 3. The mechanism: rail locality does NOT reduce UET's retransmits (~0% change vs flat).</a:t>
+            </a:r>
+          </a:p>
+          <a:p>
+            <a:pPr lvl="1" algn="l">
+              <a:spcAft>
+                <a:spcPts val="300"/>
+              </a:spcAft>
+            </a:pPr>
+            <a:r>
+              <a:rPr sz="1600" b="0" i="0">
+                <a:solidFill>
+                  <a:srgbClr val="555555"/>
+                </a:solidFill>
+                <a:latin typeface="Calibri"/>
+              </a:rPr>
+              <a:t>• MoE all-to-all makes every GPU receive from its 127 rail peers, so the bottleneck is receiver-side INCAST at the endpoint — not congestion in the fabric.</a:t>
+            </a:r>
+          </a:p>
+          <a:p>
+            <a:pPr lvl="1" algn="l">
+              <a:spcAft>
+                <a:spcPts val="300"/>
+              </a:spcAft>
+            </a:pPr>
+            <a:r>
+              <a:rPr sz="1600" b="0" i="0">
+                <a:solidFill>
+                  <a:srgbClr val="555555"/>
+                </a:solidFill>
+                <a:latin typeface="Calibri"/>
+              </a:rPr>
+              <a:t>• An endpoint bottleneck cannot be fixed by locality, and cannot be fixed by spray either. That single fact explains all three findings — and why IB's losslessness edges ahead where UET's retransmissions become pure overhead.</a:t>
+            </a:r>
+          </a:p>
+        </p:txBody>
+      </p:sp>
+    </p:spTree>
+  </p:cSld>
+  <p:clrMapOvr>
+    <a:masterClrMapping/>
+  </p:clrMapOvr>
+</p:sld>
+</file>
+
+<file path=ppt/slides/slide32.xml><?xml version="1.0" encoding="utf-8"?>
+<p:sld xmlns:a="http://schemas.openxmlformats.org/drawingml/2006/main" xmlns:p="http://schemas.openxmlformats.org/presentationml/2006/main" xmlns:r="http://schemas.openxmlformats.org/officeDocument/2006/relationships">
+  <p:cSld>
+    <p:spTree>
+      <p:nvGrpSpPr>
+        <p:cNvPr id="1" name=""/>
+        <p:cNvGrpSpPr/>
+        <p:nvPr/>
+      </p:nvGrpSpPr>
+      <p:grpSpPr/>
+      <p:sp>
+        <p:nvSpPr>
+          <p:cNvPr id="2" name="Rectangle 1"/>
+          <p:cNvSpPr/>
+          <p:nvPr/>
+        </p:nvSpPr>
+        <p:spPr>
+          <a:xfrm>
+            <a:off x="0" y="0"/>
+            <a:ext cx="12191695" cy="960120"/>
+          </a:xfrm>
+          <a:prstGeom prst="rect">
+            <a:avLst/>
+          </a:prstGeom>
+          <a:solidFill>
+            <a:srgbClr val="1F3864"/>
+          </a:solidFill>
+          <a:ln>
+            <a:noFill/>
+          </a:ln>
+        </p:spPr>
+        <p:style>
+          <a:lnRef idx="1">
+            <a:schemeClr val="accent1"/>
+          </a:lnRef>
+          <a:fillRef idx="3">
+            <a:schemeClr val="accent1"/>
+          </a:fillRef>
+          <a:effectRef idx="2">
+            <a:schemeClr val="accent1"/>
+          </a:effectRef>
+          <a:fontRef idx="minor">
+            <a:schemeClr val="lt1"/>
+          </a:fontRef>
+        </p:style>
+        <p:txBody>
+          <a:bodyPr rtlCol="0" anchor="ctr"/>
+          <a:lstStyle/>
+          <a:p>
+            <a:pPr algn="ctr"/>
+          </a:p>
+        </p:txBody>
+      </p:sp>
+      <p:sp>
+        <p:nvSpPr>
+          <p:cNvPr id="3" name="TextBox 2"/>
+          <p:cNvSpPr txBox="1"/>
+          <p:nvPr/>
+        </p:nvSpPr>
+        <p:spPr>
+          <a:xfrm>
+            <a:off x="457200" y="109728"/>
+            <a:ext cx="11247120" cy="731520"/>
+          </a:xfrm>
+          <a:prstGeom prst="rect">
+            <a:avLst/>
+          </a:prstGeom>
+          <a:noFill/>
+        </p:spPr>
+        <p:txBody>
+          <a:bodyPr wrap="square" anchor="ctr">
+            <a:spAutoFit/>
+          </a:bodyPr>
+          <a:lstStyle/>
+          <a:p>
+            <a:pPr algn="l">
+              <a:spcAft>
+                <a:spcPts val="600"/>
+              </a:spcAft>
+            </a:pPr>
+            <a:r>
+              <a:rPr sz="2600" b="1" i="0">
+                <a:solidFill>
+                  <a:srgbClr val="FFFFFF"/>
+                </a:solidFill>
+                <a:latin typeface="Calibri"/>
+              </a:rPr>
+              <a:t>Conclusions</a:t>
+            </a:r>
+          </a:p>
+        </p:txBody>
+      </p:sp>
+      <p:sp>
+        <p:nvSpPr>
+          <p:cNvPr id="4" name="TextBox 3"/>
+          <p:cNvSpPr txBox="1"/>
+          <p:nvPr/>
+        </p:nvSpPr>
+        <p:spPr>
+          <a:xfrm>
+            <a:off x="640080" y="1234440"/>
+            <a:ext cx="10972800" cy="5120640"/>
+          </a:xfrm>
+          <a:prstGeom prst="rect">
+            <a:avLst/>
+          </a:prstGeom>
+          <a:noFill/>
+        </p:spPr>
+        <p:txBody>
+          <a:bodyPr wrap="square" anchor="t">
+            <a:spAutoFit/>
+          </a:bodyPr>
+          <a:lstStyle/>
+          <a:p>
+            <a:pPr algn="l">
+              <a:spcAft>
+                <a:spcPts val="800"/>
+              </a:spcAft>
+            </a:pPr>
+            <a:r>
+              <a:rPr sz="1900" b="0" i="0">
+                <a:solidFill>
+                  <a:srgbClr val="222222"/>
+                </a:solidFill>
+                <a:latin typeface="Calibri"/>
+              </a:rPr>
+              <a:t>• Part 1 — flat fabric: a clean speed-vs-robustness trade-off.</a:t>
+            </a:r>
+          </a:p>
+          <a:p>
+            <a:pPr lvl="1" algn="l">
+              <a:spcAft>
+                <a:spcPts val="300"/>
+              </a:spcAft>
+            </a:pPr>
+            <a:r>
+              <a:rPr sz="1600" b="0" i="0">
+                <a:solidFill>
+                  <a:srgbClr val="555555"/>
+                </a:solidFill>
+                <a:latin typeface="Calibri"/>
+              </a:rPr>
+              <a:t>• UET (lossy spray) is 2-4x faster on well-behaved/permutation traffic and saturates links, but retransmits enormously under congestion and fails to complete the most extreme incasts.</a:t>
+            </a:r>
+          </a:p>
+          <a:p>
+            <a:pPr lvl="1" algn="l">
+              <a:spcAft>
+                <a:spcPts val="300"/>
+              </a:spcAft>
+            </a:pPr>
+            <a:r>
+              <a:rPr sz="1600" b="0" i="0">
+                <a:solidFill>
+                  <a:srgbClr val="555555"/>
+                </a:solidFill>
+                <a:latin typeface="Calibri"/>
+              </a:rPr>
+              <a:t>• IB (lossless PFC + DCQCN) is slower but never drops a packet, completes every workload UET cannot, and has a better tail on the heavy 1024-node incasts — paying in back-pressure and buffering.</a:t>
+            </a:r>
+          </a:p>
+          <a:p>
+            <a:pPr algn="l">
+              <a:spcAft>
+                <a:spcPts val="800"/>
+              </a:spcAft>
+            </a:pPr>
+            <a:r>
+              <a:rPr sz="1900" b="0" i="0">
+                <a:solidFill>
+                  <a:srgbClr val="222222"/>
+                </a:solidFill>
+                <a:latin typeface="Calibri"/>
+              </a:rPr>
+              <a:t>• Part 2 — rail-optimized + NVLink: the picture changes.</a:t>
+            </a:r>
+          </a:p>
+          <a:p>
+            <a:pPr lvl="1" algn="l">
+              <a:spcAft>
+                <a:spcPts val="300"/>
+              </a:spcAft>
+            </a:pPr>
+            <a:r>
+              <a:rPr sz="1600" b="0" i="0">
+                <a:solidFill>
+                  <a:srgbClr val="555555"/>
+                </a:solidFill>
+                <a:latin typeface="Calibri"/>
+              </a:rPr>
+              <a:t>• Rails+NVLink must be adopted together: rails alone are 2.2x WORSE than a flat fabric, because they scatter each server's GPUs across 8 leaves.</a:t>
+            </a:r>
+          </a:p>
+          <a:p>
+            <a:pPr lvl="1" algn="l">
+              <a:spcAft>
+                <a:spcPts val="300"/>
+              </a:spcAft>
+            </a:pPr>
+            <a:r>
+              <a:rPr sz="1600" b="0" i="0">
+                <a:solidFill>
+                  <a:srgbClr val="555555"/>
+                </a:solidFill>
+                <a:latin typeface="Calibri"/>
+              </a:rPr>
+              <a:t>• Rail-optimization is an IB optimization (-7% to -33% on every run); UET is indifferent, because spray already makes it insensitive to locality.</a:t>
+            </a:r>
+          </a:p>
+          <a:p>
+            <a:pPr lvl="1" algn="l">
+              <a:spcAft>
+                <a:spcPts val="300"/>
+              </a:spcAft>
+            </a:pPr>
+            <a:r>
+              <a:rPr sz="1600" b="0" i="0">
+                <a:solidFill>
+                  <a:srgbClr val="555555"/>
+                </a:solidFill>
+                <a:latin typeface="Calibri"/>
+              </a:rPr>
+              <a:t>• On MoE all-to-all the two stacks converge and IB overtakes UET at 100 MB — the workload is bound by receiver-side incast at the endpoint, which neither locality nor spray can relieve.</a:t>
+            </a:r>
+          </a:p>
+          <a:p>
+            <a:pPr algn="l">
+              <a:spcAft>
+                <a:spcPts val="800"/>
+              </a:spcAft>
+            </a:pPr>
+            <a:r>
+              <a:rPr sz="1900" b="0" i="0">
+                <a:solidFill>
+                  <a:srgbClr val="222222"/>
+                </a:solidFill>
+                <a:latin typeface="Calibri"/>
+              </a:rPr>
+              <a:t>• Overall: which transport wins is workload- and topology-dependent, not absolute. UET's advantage comes from path diversity, so it shrinks exactly where the bottleneck stops being the fabric.</a:t>
+            </a:r>
+          </a:p>
+        </p:txBody>
+      </p:sp>
+    </p:spTree>
+  </p:cSld>
+  <p:clrMapOvr>
+    <a:masterClrMapping/>
+  </p:clrMapOvr>
+</p:sld>
+</file>
+
+<file path=ppt/slides/slide33.xml><?xml version="1.0" encoding="utf-8"?>
+<p:sld xmlns:a="http://schemas.openxmlformats.org/drawingml/2006/main" xmlns:p="http://schemas.openxmlformats.org/presentationml/2006/main" xmlns:r="http://schemas.openxmlformats.org/officeDocument/2006/relationships">
+  <p:cSld>
+    <p:spTree>
+      <p:nvGrpSpPr>
+        <p:cNvPr id="1" name=""/>
+        <p:cNvGrpSpPr/>
+        <p:nvPr/>
+      </p:nvGrpSpPr>
+      <p:grpSpPr/>
+      <p:sp>
+        <p:nvSpPr>
+          <p:cNvPr id="2" name="Rectangle 1"/>
+          <p:cNvSpPr/>
+          <p:nvPr/>
+        </p:nvSpPr>
+        <p:spPr>
+          <a:xfrm>
+            <a:off x="0" y="0"/>
+            <a:ext cx="12191695" cy="960120"/>
+          </a:xfrm>
+          <a:prstGeom prst="rect">
+            <a:avLst/>
+          </a:prstGeom>
+          <a:solidFill>
+            <a:srgbClr val="1F3864"/>
+          </a:solidFill>
+          <a:ln>
+            <a:noFill/>
+          </a:ln>
+        </p:spPr>
+        <p:style>
+          <a:lnRef idx="1">
+            <a:schemeClr val="accent1"/>
+          </a:lnRef>
+          <a:fillRef idx="3">
+            <a:schemeClr val="accent1"/>
+          </a:fillRef>
+          <a:effectRef idx="2">
+            <a:schemeClr val="accent1"/>
+          </a:effectRef>
+          <a:fontRef idx="minor">
+            <a:schemeClr val="lt1"/>
+          </a:fontRef>
+        </p:style>
+        <p:txBody>
+          <a:bodyPr rtlCol="0" anchor="ctr"/>
+          <a:lstStyle/>
+          <a:p>
+            <a:pPr algn="ctr"/>
+          </a:p>
+        </p:txBody>
+      </p:sp>
+      <p:sp>
+        <p:nvSpPr>
+          <p:cNvPr id="3" name="TextBox 2"/>
+          <p:cNvSpPr txBox="1"/>
+          <p:nvPr/>
+        </p:nvSpPr>
+        <p:spPr>
+          <a:xfrm>
+            <a:off x="457200" y="109728"/>
+            <a:ext cx="11247120" cy="731520"/>
+          </a:xfrm>
+          <a:prstGeom prst="rect">
+            <a:avLst/>
+          </a:prstGeom>
+          <a:noFill/>
+        </p:spPr>
+        <p:txBody>
+          <a:bodyPr wrap="square" anchor="ctr">
+            <a:spAutoFit/>
+          </a:bodyPr>
+          <a:lstStyle/>
+          <a:p>
+            <a:pPr algn="l">
+              <a:spcAft>
+                <a:spcPts val="600"/>
+              </a:spcAft>
+            </a:pPr>
+            <a:r>
+              <a:rPr sz="2600" b="1" i="0">
+                <a:solidFill>
+                  <a:srgbClr val="FFFFFF"/>
+                </a:solidFill>
+                <a:latin typeface="Calibri"/>
+              </a:rPr>
+              <a:t>Future work</a:t>
+            </a:r>
+          </a:p>
+        </p:txBody>
+      </p:sp>
+      <p:sp>
+        <p:nvSpPr>
+          <p:cNvPr id="4" name="TextBox 3"/>
+          <p:cNvSpPr txBox="1"/>
+          <p:nvPr/>
+        </p:nvSpPr>
+        <p:spPr>
+          <a:xfrm>
+            <a:off x="640080" y="1234440"/>
+            <a:ext cx="10972800" cy="5120640"/>
+          </a:xfrm>
+          <a:prstGeom prst="rect">
+            <a:avLst/>
+          </a:prstGeom>
+          <a:noFill/>
+        </p:spPr>
+        <p:txBody>
+          <a:bodyPr wrap="square" anchor="t">
+            <a:spAutoFit/>
+          </a:bodyPr>
+          <a:lstStyle/>
+          <a:p>
+            <a:pPr algn="l">
+              <a:spcAft>
+                <a:spcPts val="800"/>
+              </a:spcAft>
+            </a:pPr>
+            <a:r>
+              <a:rPr sz="1900" b="0" i="0">
+                <a:solidFill>
+                  <a:srgbClr val="222222"/>
+                </a:solidFill>
+                <a:latin typeface="Calibri"/>
+              </a:rPr>
+              <a:t>• Confirm the endpoint-incast explanation directly by instrumenting per-receiver backlog (currently inferred from retransmit behaviour, not measured).</a:t>
+            </a:r>
+          </a:p>
+          <a:p>
+            <a:pPr algn="l">
+              <a:spcAft>
+                <a:spcPts val="800"/>
+              </a:spcAft>
+            </a:pPr>
+            <a:r>
+              <a:rPr sz="1900" b="0" i="0">
+                <a:solidFill>
+                  <a:srgbClr val="222222"/>
+                </a:solidFill>
+                <a:latin typeface="Calibri"/>
+              </a:rPr>
+              <a:t>• Tune DCQCN (ECN threshold K, min rate) — K=8 was one operating point, never swept.</a:t>
+            </a:r>
+          </a:p>
+          <a:p>
+            <a:pPr algn="l">
+              <a:spcAft>
+                <a:spcPts val="800"/>
+              </a:spcAft>
+            </a:pPr>
+            <a:r>
+              <a:rPr sz="1900" b="0" i="0">
+                <a:solidFill>
+                  <a:srgbClr val="222222"/>
+                </a:solidFill>
+                <a:latin typeface="Calibri"/>
+              </a:rPr>
+              <a:t>• Adaptive routing for IB (ecmp_ar): would give IB some path diversity and likely close part of the permutation gap.</a:t>
+            </a:r>
+          </a:p>
+          <a:p>
+            <a:pPr algn="l">
+              <a:spcAft>
+                <a:spcPts val="800"/>
+              </a:spcAft>
+            </a:pPr>
+            <a:r>
+              <a:rPr sz="1900" b="0" i="0">
+                <a:solidFill>
+                  <a:srgbClr val="222222"/>
+                </a:solidFill>
+                <a:latin typeface="Calibri"/>
+              </a:rPr>
+              <a:t>• Rail-aware workloads beyond these two: all-gather / reduce-scatter (FSDP, ZeRO-3) and pipeline-parallel point-to-point.</a:t>
+            </a:r>
+          </a:p>
+          <a:p>
+            <a:pPr algn="l">
+              <a:spcAft>
+                <a:spcPts val="800"/>
+              </a:spcAft>
+            </a:pPr>
+            <a:r>
+              <a:rPr sz="1900" b="0" i="0">
+                <a:solidFill>
+                  <a:srgbClr val="222222"/>
+                </a:solidFill>
+                <a:latin typeface="Calibri"/>
+              </a:rPr>
+              <a:t>• Sensitivity to the NVLink rate, and to rail count / servers-per-leaf (the sweep fixed 8 rails x 4 leaves).</a:t>
+            </a:r>
+          </a:p>
+          <a:p>
+            <a:pPr algn="l">
+              <a:spcAft>
+                <a:spcPts val="800"/>
+              </a:spcAft>
+            </a:pPr>
+            <a:r>
+              <a:rPr sz="1900" b="0" i="0">
+                <a:solidFill>
+                  <a:srgbClr val="222222"/>
+                </a:solidFill>
+                <a:latin typeface="Calibri"/>
+              </a:rPr>
+              <a:t>• Larger scale (8192 GPUs) and real AI communication traces (GOAL / ATLAHS).</a:t>
+            </a:r>
+          </a:p>
+          <a:p>
+            <a:pPr algn="l">
+              <a:spcAft>
+                <a:spcPts val="800"/>
+              </a:spcAft>
+            </a:pPr>
+            <a:r>
+              <a:rPr sz="1900" b="0" i="0">
+                <a:solidFill>
+                  <a:srgbClr val="222222"/>
+                </a:solidFill>
+                <a:latin typeface="Calibri"/>
+              </a:rPr>
+              <a:t>• Symmetric fairness metrics: per-flow fairness for trigger-staged workloads needs per-flow start times (currently an artifact for staged collectives).</a:t>
+            </a:r>
+          </a:p>
+        </p:txBody>
+      </p:sp>
+    </p:spTree>
+  </p:cSld>
+  <p:clrMapOvr>
+    <a:masterClrMapping/>
+  </p:clrMapOvr>
+</p:sld>
+</file>
+
+<file path=ppt/slides/slide34.xml><?xml version="1.0" encoding="utf-8"?>
+<p:sld xmlns:a="http://schemas.openxmlformats.org/drawingml/2006/main" xmlns:p="http://schemas.openxmlformats.org/presentationml/2006/main" xmlns:r="http://schemas.openxmlformats.org/officeDocument/2006/relationships">
+  <p:cSld>
+    <p:spTree>
+      <p:nvGrpSpPr>
+        <p:cNvPr id="1" name=""/>
+        <p:cNvGrpSpPr/>
+        <p:nvPr/>
+      </p:nvGrpSpPr>
+      <p:grpSpPr/>
+      <p:sp>
+        <p:nvSpPr>
+          <p:cNvPr id="2" name="Rectangle 1"/>
+          <p:cNvSpPr/>
+          <p:nvPr/>
+        </p:nvSpPr>
+        <p:spPr>
+          <a:xfrm>
+            <a:off x="0" y="0"/>
+            <a:ext cx="12191695" cy="6858000"/>
+          </a:xfrm>
+          <a:prstGeom prst="rect">
+            <a:avLst/>
+          </a:prstGeom>
+          <a:solidFill>
+            <a:srgbClr val="1F3864"/>
+          </a:solidFill>
+          <a:ln>
+            <a:noFill/>
+          </a:ln>
+        </p:spPr>
+        <p:style>
+          <a:lnRef idx="1">
+            <a:schemeClr val="accent1"/>
+          </a:lnRef>
+          <a:fillRef idx="3">
+            <a:schemeClr val="accent1"/>
+          </a:fillRef>
+          <a:effectRef idx="2">
+            <a:schemeClr val="accent1"/>
+          </a:effectRef>
+          <a:fontRef idx="minor">
+            <a:schemeClr val="lt1"/>
+          </a:fontRef>
+        </p:style>
+        <p:txBody>
+          <a:bodyPr rtlCol="0" anchor="ctr"/>
+          <a:lstStyle/>
+          <a:p>
+            <a:pPr algn="ctr"/>
+          </a:p>
+        </p:txBody>
+      </p:sp>
+      <p:sp>
+        <p:nvSpPr>
+          <p:cNvPr id="3" name="TextBox 2"/>
+          <p:cNvSpPr txBox="1"/>
+          <p:nvPr/>
+        </p:nvSpPr>
+        <p:spPr>
+          <a:xfrm>
+            <a:off x="914400" y="2834640"/>
+            <a:ext cx="10332720" cy="1188720"/>
+          </a:xfrm>
+          <a:prstGeom prst="rect">
+            <a:avLst/>
+          </a:prstGeom>
+          <a:noFill/>
+        </p:spPr>
+        <p:txBody>
+          <a:bodyPr wrap="square" anchor="ctr">
+            <a:spAutoFit/>
+          </a:bodyPr>
+          <a:lstStyle/>
+          <a:p>
+            <a:pPr algn="ctr">
+              <a:spcAft>
+                <a:spcPts val="600"/>
+              </a:spcAft>
+            </a:pPr>
+            <a:r>
+              <a:rPr sz="4000" b="1" i="0">
+                <a:solidFill>
+                  <a:srgbClr val="FFFFFF"/>
+                </a:solidFill>
+                <a:latin typeface="Calibri"/>
+              </a:rPr>
+              <a:t>Thank you</a:t>
+            </a:r>
+          </a:p>
+          <a:p>
+            <a:pPr algn="ctr">
+              <a:spcAft>
+                <a:spcPts val="600"/>
+              </a:spcAft>
+            </a:pPr>
+            <a:r>
+              <a:rPr sz="1800" b="0" i="0">
+                <a:solidFill>
+                  <a:srgbClr val="CFD8EA"/>
+                </a:solidFill>
+                <a:latin typeface="Calibri"/>
+              </a:rPr>
+              <a:t>IB (RoCE/DCQCN) vs Ultra Ethernet — controlled comparison in htsim</a:t>
             </a:r>
           </a:p>
         </p:txBody>
